--- a/teaching/cs513-autocps-fall-2026/slides/2-ModelsOfComputation.pptx
+++ b/teaching/cs513-autocps-fall-2026/slides/2-ModelsOfComputation.pptx
@@ -5,10 +5,10 @@
     <p:sldMasterId id="2147483648" r:id="rId1"/>
   </p:sldMasterIdLst>
   <p:notesMasterIdLst>
-    <p:notesMasterId r:id="rId49"/>
+    <p:notesMasterId r:id="rId50"/>
   </p:notesMasterIdLst>
   <p:handoutMasterIdLst>
-    <p:handoutMasterId r:id="rId50"/>
+    <p:handoutMasterId r:id="rId51"/>
   </p:handoutMasterIdLst>
   <p:sldIdLst>
     <p:sldId id="341" r:id="rId2"/>
@@ -57,7 +57,8 @@
     <p:sldId id="331" r:id="rId45"/>
     <p:sldId id="305" r:id="rId46"/>
     <p:sldId id="306" r:id="rId47"/>
-    <p:sldId id="340" r:id="rId48"/>
+    <p:sldId id="347" r:id="rId48"/>
+    <p:sldId id="340" r:id="rId49"/>
   </p:sldIdLst>
   <p:sldSz cx="12192000" cy="6858000"/>
   <p:notesSz cx="6858000" cy="9144000"/>
@@ -261,7 +262,7 @@
           <a:p>
             <a:fld id="{459B985A-4C37-4D1F-A437-E4A951A85D11}" type="datetimeFigureOut">
               <a:rPr lang="en-US" smtClean="0"/>
-              <a:t>8/18/2026</a:t>
+              <a:t>8/24/2026</a:t>
             </a:fld>
             <a:endParaRPr lang="en-US"/>
           </a:p>
@@ -662,7 +663,7 @@
           <a:p>
             <a:fld id="{6580C23F-98B7-41D4-A9FA-15A275A51486}" type="datetimeFigureOut">
               <a:rPr lang="en-US" smtClean="0"/>
-              <a:t>8/18/2026</a:t>
+              <a:t>8/24/2026</a:t>
             </a:fld>
             <a:endParaRPr lang="en-US"/>
           </a:p>
@@ -1407,7 +1408,7 @@
             <a:spLocks noGrp="1"/>
           </p:cNvSpPr>
           <p:nvPr>
-            <p:ph idx="1"/>
+            <p:ph idx="1" hasCustomPrompt="1"/>
           </p:nvPr>
         </p:nvSpPr>
         <p:spPr>
@@ -1429,7 +1430,10 @@
               <a:buSzPct val="80000"/>
               <a:buFont typeface="Wingdings 3" panose="05040102010807070707" pitchFamily="18" charset="2"/>
               <a:buChar char=""/>
-              <a:defRPr/>
+              <a:defRPr>
+                <a:latin typeface="Cambria" panose="02040503050406030204" pitchFamily="18" charset="0"/>
+                <a:ea typeface="Cambria" panose="02040503050406030204" pitchFamily="18" charset="0"/>
+              </a:defRPr>
             </a:lvl1pPr>
             <a:lvl2pPr marL="685800" indent="-274320">
               <a:buClr>
@@ -1438,7 +1442,10 @@
               <a:buSzPct val="75000"/>
               <a:buFont typeface="Wingdings 3" panose="05040102010807070707" pitchFamily="18" charset="2"/>
               <a:buChar char=""/>
-              <a:defRPr/>
+              <a:defRPr>
+                <a:latin typeface="Cambria" panose="02040503050406030204" pitchFamily="18" charset="0"/>
+                <a:ea typeface="Cambria" panose="02040503050406030204" pitchFamily="18" charset="0"/>
+              </a:defRPr>
             </a:lvl2pPr>
             <a:lvl3pPr marL="1143000" indent="-228600">
               <a:buClr>
@@ -1447,21 +1454,30 @@
               <a:buSzPct val="70000"/>
               <a:buFont typeface="Wingdings 3" panose="05040102010807070707" pitchFamily="18" charset="2"/>
               <a:buChar char=""/>
-              <a:defRPr/>
+              <a:defRPr>
+                <a:latin typeface="Cambria" panose="02040503050406030204" pitchFamily="18" charset="0"/>
+                <a:ea typeface="Cambria" panose="02040503050406030204" pitchFamily="18" charset="0"/>
+              </a:defRPr>
             </a:lvl3pPr>
             <a:lvl4pPr>
               <a:buClr>
                 <a:srgbClr val="FF9B9B"/>
               </a:buClr>
               <a:buSzPct val="65000"/>
-              <a:defRPr/>
+              <a:defRPr>
+                <a:latin typeface="Cambria" panose="02040503050406030204" pitchFamily="18" charset="0"/>
+                <a:ea typeface="Cambria" panose="02040503050406030204" pitchFamily="18" charset="0"/>
+              </a:defRPr>
             </a:lvl4pPr>
             <a:lvl5pPr>
               <a:buClr>
                 <a:srgbClr val="FF9B9B"/>
               </a:buClr>
               <a:buSzPct val="60000"/>
-              <a:defRPr/>
+              <a:defRPr>
+                <a:latin typeface="Cambria" panose="02040503050406030204" pitchFamily="18" charset="0"/>
+                <a:ea typeface="Cambria" panose="02040503050406030204" pitchFamily="18" charset="0"/>
+              </a:defRPr>
             </a:lvl5pPr>
           </a:lstStyle>
           <a:p>
@@ -1516,7 +1532,7 @@
           <p:nvPr userDrawn="1"/>
         </p:nvPicPr>
         <mc:AlternateContent xmlns:mc="http://schemas.openxmlformats.org/markup-compatibility/2006">
-          <mc:Choice xmlns:ma="http://schemas.microsoft.com/office/mac/drawingml/2008/main" xmlns:mv="urn:schemas-microsoft-com:mac:vml" xmlns="" Requires="ma">
+          <mc:Choice xmlns="" xmlns:mv="urn:schemas-microsoft-com:mac:vml" xmlns:ma="http://schemas.microsoft.com/office/mac/drawingml/2008/main" Requires="ma">
             <p:blipFill>
               <a:blip r:embed="rId3"/>
               <a:stretch>
@@ -1576,6 +1592,8 @@
                 <a:solidFill>
                   <a:srgbClr val="C00000"/>
                 </a:solidFill>
+                <a:latin typeface="Cambria" panose="02040503050406030204" pitchFamily="18" charset="0"/>
+                <a:ea typeface="Cambria" panose="02040503050406030204" pitchFamily="18" charset="0"/>
               </a:defRPr>
             </a:lvl1pPr>
           </a:lstStyle>
@@ -1718,6 +1736,138 @@
               </a:rPr>
               <a:t>Department of Computer Science</a:t>
             </a:r>
+          </a:p>
+        </p:txBody>
+      </p:sp>
+      <p:sp>
+        <p:nvSpPr>
+          <p:cNvPr id="2" name="Slide Number Placeholder 5">
+            <a:extLst>
+              <a:ext uri="{FF2B5EF4-FFF2-40B4-BE49-F238E27FC236}">
+                <a16:creationId xmlns:a16="http://schemas.microsoft.com/office/drawing/2014/main" id="{F33D9218-5CDF-9C7A-45D8-ED35E0C72730}"/>
+              </a:ext>
+            </a:extLst>
+          </p:cNvPr>
+          <p:cNvSpPr txBox="1">
+            <a:spLocks/>
+          </p:cNvSpPr>
+          <p:nvPr userDrawn="1"/>
+        </p:nvSpPr>
+        <p:spPr>
+          <a:xfrm>
+            <a:off x="9345496" y="6321494"/>
+            <a:ext cx="2743200" cy="365125"/>
+          </a:xfrm>
+          <a:prstGeom prst="rect">
+            <a:avLst/>
+          </a:prstGeom>
+        </p:spPr>
+        <p:txBody>
+          <a:bodyPr vert="horz" lIns="91440" tIns="45720" rIns="91440" bIns="45720" rtlCol="0" anchor="ctr"/>
+          <a:lstStyle>
+            <a:defPPr>
+              <a:defRPr lang="en-US"/>
+            </a:defPPr>
+            <a:lvl1pPr marL="0" algn="ctr" defTabSz="914400" rtl="0" eaLnBrk="1" latinLnBrk="0" hangingPunct="1">
+              <a:defRPr sz="1400" kern="1200">
+                <a:solidFill>
+                  <a:schemeClr val="tx1">
+                    <a:tint val="75000"/>
+                  </a:schemeClr>
+                </a:solidFill>
+                <a:latin typeface="+mn-lt"/>
+                <a:ea typeface="+mn-ea"/>
+                <a:cs typeface="+mn-cs"/>
+              </a:defRPr>
+            </a:lvl1pPr>
+            <a:lvl2pPr marL="457200" algn="l" defTabSz="914400" rtl="0" eaLnBrk="1" latinLnBrk="0" hangingPunct="1">
+              <a:defRPr sz="1800" kern="1200">
+                <a:solidFill>
+                  <a:schemeClr val="tx1"/>
+                </a:solidFill>
+                <a:latin typeface="+mn-lt"/>
+                <a:ea typeface="+mn-ea"/>
+                <a:cs typeface="+mn-cs"/>
+              </a:defRPr>
+            </a:lvl2pPr>
+            <a:lvl3pPr marL="914400" algn="l" defTabSz="914400" rtl="0" eaLnBrk="1" latinLnBrk="0" hangingPunct="1">
+              <a:defRPr sz="1800" kern="1200">
+                <a:solidFill>
+                  <a:schemeClr val="tx1"/>
+                </a:solidFill>
+                <a:latin typeface="+mn-lt"/>
+                <a:ea typeface="+mn-ea"/>
+                <a:cs typeface="+mn-cs"/>
+              </a:defRPr>
+            </a:lvl3pPr>
+            <a:lvl4pPr marL="1371600" algn="l" defTabSz="914400" rtl="0" eaLnBrk="1" latinLnBrk="0" hangingPunct="1">
+              <a:defRPr sz="1800" kern="1200">
+                <a:solidFill>
+                  <a:schemeClr val="tx1"/>
+                </a:solidFill>
+                <a:latin typeface="+mn-lt"/>
+                <a:ea typeface="+mn-ea"/>
+                <a:cs typeface="+mn-cs"/>
+              </a:defRPr>
+            </a:lvl4pPr>
+            <a:lvl5pPr marL="1828800" algn="l" defTabSz="914400" rtl="0" eaLnBrk="1" latinLnBrk="0" hangingPunct="1">
+              <a:defRPr sz="1800" kern="1200">
+                <a:solidFill>
+                  <a:schemeClr val="tx1"/>
+                </a:solidFill>
+                <a:latin typeface="+mn-lt"/>
+                <a:ea typeface="+mn-ea"/>
+                <a:cs typeface="+mn-cs"/>
+              </a:defRPr>
+            </a:lvl5pPr>
+            <a:lvl6pPr marL="2286000" algn="l" defTabSz="914400" rtl="0" eaLnBrk="1" latinLnBrk="0" hangingPunct="1">
+              <a:defRPr sz="1800" kern="1200">
+                <a:solidFill>
+                  <a:schemeClr val="tx1"/>
+                </a:solidFill>
+                <a:latin typeface="+mn-lt"/>
+                <a:ea typeface="+mn-ea"/>
+                <a:cs typeface="+mn-cs"/>
+              </a:defRPr>
+            </a:lvl6pPr>
+            <a:lvl7pPr marL="2743200" algn="l" defTabSz="914400" rtl="0" eaLnBrk="1" latinLnBrk="0" hangingPunct="1">
+              <a:defRPr sz="1800" kern="1200">
+                <a:solidFill>
+                  <a:schemeClr val="tx1"/>
+                </a:solidFill>
+                <a:latin typeface="+mn-lt"/>
+                <a:ea typeface="+mn-ea"/>
+                <a:cs typeface="+mn-cs"/>
+              </a:defRPr>
+            </a:lvl7pPr>
+            <a:lvl8pPr marL="3200400" algn="l" defTabSz="914400" rtl="0" eaLnBrk="1" latinLnBrk="0" hangingPunct="1">
+              <a:defRPr sz="1800" kern="1200">
+                <a:solidFill>
+                  <a:schemeClr val="tx1"/>
+                </a:solidFill>
+                <a:latin typeface="+mn-lt"/>
+                <a:ea typeface="+mn-ea"/>
+                <a:cs typeface="+mn-cs"/>
+              </a:defRPr>
+            </a:lvl8pPr>
+            <a:lvl9pPr marL="3657600" algn="l" defTabSz="914400" rtl="0" eaLnBrk="1" latinLnBrk="0" hangingPunct="1">
+              <a:defRPr sz="1800" kern="1200">
+                <a:solidFill>
+                  <a:schemeClr val="tx1"/>
+                </a:solidFill>
+                <a:latin typeface="+mn-lt"/>
+                <a:ea typeface="+mn-ea"/>
+                <a:cs typeface="+mn-cs"/>
+              </a:defRPr>
+            </a:lvl9pPr>
+          </a:lstStyle>
+          <a:p>
+            <a:fld id="{29AAD378-655A-49C6-813C-9FD132EF7440}" type="slidenum">
+              <a:rPr lang="en-US" smtClean="0"/>
+              <a:pPr/>
+              <a:t>‹#›</a:t>
+            </a:fld>
+            <a:endParaRPr lang="en-US"/>
           </a:p>
         </p:txBody>
       </p:sp>
@@ -2082,8 +2232,8 @@
           <a:solidFill>
             <a:schemeClr val="tx1"/>
           </a:solidFill>
-          <a:latin typeface="+mj-lt"/>
-          <a:ea typeface="+mj-ea"/>
+          <a:latin typeface="Cambria" panose="02040503050406030204" pitchFamily="18" charset="0"/>
+          <a:ea typeface="Cambria" panose="02040503050406030204" pitchFamily="18" charset="0"/>
           <a:cs typeface="+mj-cs"/>
         </a:defRPr>
       </a:lvl1pPr>
@@ -2110,8 +2260,8 @@
           <a:solidFill>
             <a:schemeClr val="tx1"/>
           </a:solidFill>
-          <a:latin typeface="+mn-lt"/>
-          <a:ea typeface="+mn-ea"/>
+          <a:latin typeface="Cambria" panose="02040503050406030204" pitchFamily="18" charset="0"/>
+          <a:ea typeface="Cambria" panose="02040503050406030204" pitchFamily="18" charset="0"/>
           <a:cs typeface="+mn-cs"/>
         </a:defRPr>
       </a:lvl1pPr>
@@ -2139,8 +2289,8 @@
           <a:solidFill>
             <a:schemeClr val="tx1"/>
           </a:solidFill>
-          <a:latin typeface="+mn-lt"/>
-          <a:ea typeface="+mn-ea"/>
+          <a:latin typeface="Cambria" panose="02040503050406030204" pitchFamily="18" charset="0"/>
+          <a:ea typeface="Cambria" panose="02040503050406030204" pitchFamily="18" charset="0"/>
           <a:cs typeface="+mn-cs"/>
         </a:defRPr>
       </a:lvl2pPr>
@@ -2168,8 +2318,8 @@
           <a:solidFill>
             <a:schemeClr val="tx1"/>
           </a:solidFill>
-          <a:latin typeface="+mn-lt"/>
-          <a:ea typeface="+mn-ea"/>
+          <a:latin typeface="Cambria" panose="02040503050406030204" pitchFamily="18" charset="0"/>
+          <a:ea typeface="Cambria" panose="02040503050406030204" pitchFamily="18" charset="0"/>
           <a:cs typeface="+mn-cs"/>
         </a:defRPr>
       </a:lvl3pPr>
@@ -2197,8 +2347,8 @@
           <a:solidFill>
             <a:schemeClr val="tx1"/>
           </a:solidFill>
-          <a:latin typeface="+mn-lt"/>
-          <a:ea typeface="+mn-ea"/>
+          <a:latin typeface="Cambria" panose="02040503050406030204" pitchFamily="18" charset="0"/>
+          <a:ea typeface="Cambria" panose="02040503050406030204" pitchFamily="18" charset="0"/>
           <a:cs typeface="+mn-cs"/>
         </a:defRPr>
       </a:lvl4pPr>
@@ -2226,8 +2376,8 @@
           <a:solidFill>
             <a:schemeClr val="tx1"/>
           </a:solidFill>
-          <a:latin typeface="+mn-lt"/>
-          <a:ea typeface="+mn-ea"/>
+          <a:latin typeface="Cambria" panose="02040503050406030204" pitchFamily="18" charset="0"/>
+          <a:ea typeface="Cambria" panose="02040503050406030204" pitchFamily="18" charset="0"/>
           <a:cs typeface="+mn-cs"/>
         </a:defRPr>
       </a:lvl5pPr>
@@ -4607,8 +4757,8 @@
           <a:chExt cx="0" cy="0"/>
         </a:xfrm>
       </p:grpSpPr>
-      <mc:AlternateContent xmlns:mc="http://schemas.openxmlformats.org/markup-compatibility/2006" xmlns:a14="http://schemas.microsoft.com/office/drawing/2010/main">
-        <mc:Choice Requires="a14">
+      <mc:AlternateContent xmlns:mc="http://schemas.openxmlformats.org/markup-compatibility/2006">
+        <mc:Choice xmlns:a14="http://schemas.microsoft.com/office/drawing/2010/main" Requires="a14">
           <p:sp>
             <p:nvSpPr>
               <p:cNvPr id="2" name="Content Placeholder 1">
@@ -4637,7 +4787,7 @@
               <a:p>
                 <a:r>
                   <a:rPr lang="en-US" dirty="0"/>
-                  <a:t>Synch. comp. is a tuple: </a:t>
+                  <a:t>Synchronous component is a tuple: </a:t>
                 </a:r>
                 <a14:m>
                   <m:oMath xmlns:m="http://schemas.openxmlformats.org/officeDocument/2006/math">
@@ -4705,7 +4855,7 @@
             </p:txBody>
           </p:sp>
         </mc:Choice>
-        <mc:Fallback xmlns="">
+        <mc:Fallback>
           <p:sp>
             <p:nvSpPr>
               <p:cNvPr id="2" name="Content Placeholder 1">
@@ -4730,7 +4880,7 @@
               <a:blipFill>
                 <a:blip r:embed="rId2"/>
                 <a:stretch>
-                  <a:fillRect l="-625" t="-18478" b="-16304"/>
+                  <a:fillRect l="-625" t="-19565" b="-15217"/>
                 </a:stretch>
               </a:blipFill>
             </p:spPr>
@@ -4807,8 +4957,8 @@
           </a:p>
         </p:txBody>
       </p:sp>
-      <mc:AlternateContent xmlns:mc="http://schemas.openxmlformats.org/markup-compatibility/2006" xmlns:a14="http://schemas.microsoft.com/office/drawing/2010/main">
-        <mc:Choice Requires="a14">
+      <mc:AlternateContent xmlns:mc="http://schemas.openxmlformats.org/markup-compatibility/2006">
+        <mc:Choice xmlns:a14="http://schemas.microsoft.com/office/drawing/2010/main" Requires="a14">
           <p:graphicFrame>
             <p:nvGraphicFramePr>
               <p:cNvPr id="5" name="Table 4">
@@ -4824,14 +4974,14 @@
               <p:nvPr>
                 <p:extLst>
                   <p:ext uri="{D42A27DB-BD31-4B8C-83A1-F6EECF244321}">
-                    <p14:modId xmlns:p14="http://schemas.microsoft.com/office/powerpoint/2010/main" val="2851131839"/>
+                    <p14:modId xmlns:p14="http://schemas.microsoft.com/office/powerpoint/2010/main" val="868866917"/>
                   </p:ext>
                 </p:extLst>
               </p:nvPr>
             </p:nvGraphicFramePr>
             <p:xfrm>
               <a:off x="244928" y="1759644"/>
-              <a:ext cx="11832771" cy="3968418"/>
+              <a:ext cx="11832771" cy="3919624"/>
             </p:xfrm>
             <a:graphic>
               <a:graphicData uri="http://schemas.openxmlformats.org/drawingml/2006/table">
@@ -4840,14 +4990,14 @@
                     <a:tableStyleId>{ED083AE6-46FA-4A59-8FB0-9F97EB10719F}</a:tableStyleId>
                   </a:tblPr>
                   <a:tblGrid>
-                    <a:gridCol w="995579">
+                    <a:gridCol w="1337438">
                       <a:extLst>
                         <a:ext uri="{9D8B030D-6E8A-4147-A177-3AD203B41FA5}">
                           <a16:colId xmlns:a16="http://schemas.microsoft.com/office/drawing/2014/main" val="3050629214"/>
                         </a:ext>
                       </a:extLst>
                     </a:gridCol>
-                    <a:gridCol w="5828049">
+                    <a:gridCol w="5486190">
                       <a:extLst>
                         <a:ext uri="{9D8B030D-6E8A-4147-A177-3AD203B41FA5}">
                           <a16:colId xmlns:a16="http://schemas.microsoft.com/office/drawing/2014/main" val="3839434824"/>
@@ -5944,7 +6094,7 @@
             </a:graphic>
           </p:graphicFrame>
         </mc:Choice>
-        <mc:Fallback xmlns="">
+        <mc:Fallback>
           <p:graphicFrame>
             <p:nvGraphicFramePr>
               <p:cNvPr id="5" name="Table 4">
@@ -5960,14 +6110,14 @@
               <p:nvPr>
                 <p:extLst>
                   <p:ext uri="{D42A27DB-BD31-4B8C-83A1-F6EECF244321}">
-                    <p14:modId xmlns:p14="http://schemas.microsoft.com/office/powerpoint/2010/main" val="2851131839"/>
+                    <p14:modId xmlns:p14="http://schemas.microsoft.com/office/powerpoint/2010/main" val="868866917"/>
                   </p:ext>
                 </p:extLst>
               </p:nvPr>
             </p:nvGraphicFramePr>
             <p:xfrm>
               <a:off x="244928" y="1759644"/>
-              <a:ext cx="11832771" cy="3968418"/>
+              <a:ext cx="11832771" cy="3919624"/>
             </p:xfrm>
             <a:graphic>
               <a:graphicData uri="http://schemas.openxmlformats.org/drawingml/2006/table">
@@ -5976,14 +6126,14 @@
                     <a:tableStyleId>{ED083AE6-46FA-4A59-8FB0-9F97EB10719F}</a:tableStyleId>
                   </a:tblPr>
                   <a:tblGrid>
-                    <a:gridCol w="995579">
+                    <a:gridCol w="1337438">
                       <a:extLst>
                         <a:ext uri="{9D8B030D-6E8A-4147-A177-3AD203B41FA5}">
                           <a16:colId xmlns:a16="http://schemas.microsoft.com/office/drawing/2014/main" val="3050629214"/>
                         </a:ext>
                       </a:extLst>
                     </a:gridCol>
-                    <a:gridCol w="5828049">
+                    <a:gridCol w="5486190">
                       <a:extLst>
                         <a:ext uri="{9D8B030D-6E8A-4147-A177-3AD203B41FA5}">
                           <a16:colId xmlns:a16="http://schemas.microsoft.com/office/drawing/2014/main" val="3839434824"/>
@@ -5998,7 +6148,7 @@
                       </a:extLst>
                     </a:gridCol>
                   </a:tblGrid>
-                  <a:tr h="822960">
+                  <a:tr h="774166">
                     <a:tc>
                       <a:txBody>
                         <a:bodyPr/>
@@ -6068,7 +6218,7 @@
                         <a:blipFill>
                           <a:blip r:embed="rId3"/>
                           <a:stretch>
-                            <a:fillRect l="-613" t="-111811" r="-1093252" b="-309449"/>
+                            <a:fillRect l="-455" t="-105512" r="-784091" b="-309449"/>
                           </a:stretch>
                         </a:blipFill>
                       </a:tcPr>
@@ -6085,7 +6235,7 @@
                         <a:blipFill>
                           <a:blip r:embed="rId3"/>
                           <a:stretch>
-                            <a:fillRect l="-17137" t="-111811" r="-86207" b="-309449"/>
+                            <a:fillRect l="-24556" t="-105512" r="-91667" b="-309449"/>
                           </a:stretch>
                         </a:blipFill>
                       </a:tcPr>
@@ -6102,7 +6252,7 @@
                         <a:blipFill>
                           <a:blip r:embed="rId3"/>
                           <a:stretch>
-                            <a:fillRect l="-136375" t="-111811" r="-365" b="-309449"/>
+                            <a:fillRect l="-136375" t="-105512" r="-365" b="-309449"/>
                           </a:stretch>
                         </a:blipFill>
                       </a:tcPr>
@@ -6126,7 +6276,7 @@
                         <a:blipFill>
                           <a:blip r:embed="rId3"/>
                           <a:stretch>
-                            <a:fillRect l="-613" t="-210156" r="-1093252" b="-207031"/>
+                            <a:fillRect l="-455" t="-203906" r="-784091" b="-207031"/>
                           </a:stretch>
                         </a:blipFill>
                       </a:tcPr>
@@ -6143,7 +6293,7 @@
                         <a:blipFill>
                           <a:blip r:embed="rId3"/>
                           <a:stretch>
-                            <a:fillRect l="-17137" t="-210156" r="-86207" b="-207031"/>
+                            <a:fillRect l="-24556" t="-203906" r="-91667" b="-207031"/>
                           </a:stretch>
                         </a:blipFill>
                       </a:tcPr>
@@ -6160,7 +6310,7 @@
                         <a:blipFill>
                           <a:blip r:embed="rId3"/>
                           <a:stretch>
-                            <a:fillRect l="-136375" t="-210156" r="-365" b="-207031"/>
+                            <a:fillRect l="-136375" t="-203906" r="-365" b="-207031"/>
                           </a:stretch>
                         </a:blipFill>
                       </a:tcPr>
@@ -6184,7 +6334,7 @@
                         <a:blipFill>
                           <a:blip r:embed="rId3"/>
                           <a:stretch>
-                            <a:fillRect l="-613" t="-312598" r="-1093252" b="-108661"/>
+                            <a:fillRect l="-455" t="-306299" r="-784091" b="-108661"/>
                           </a:stretch>
                         </a:blipFill>
                       </a:tcPr>
@@ -6201,7 +6351,7 @@
                         <a:blipFill>
                           <a:blip r:embed="rId3"/>
                           <a:stretch>
-                            <a:fillRect l="-17137" t="-312598" r="-86207" b="-108661"/>
+                            <a:fillRect l="-24556" t="-306299" r="-91667" b="-108661"/>
                           </a:stretch>
                         </a:blipFill>
                       </a:tcPr>
@@ -6218,7 +6368,7 @@
                         <a:blipFill>
                           <a:blip r:embed="rId3"/>
                           <a:stretch>
-                            <a:fillRect l="-136375" t="-312598" r="-365" b="-108661"/>
+                            <a:fillRect l="-136375" t="-306299" r="-365" b="-108661"/>
                           </a:stretch>
                         </a:blipFill>
                       </a:tcPr>
@@ -6242,7 +6392,7 @@
                         <a:blipFill>
                           <a:blip r:embed="rId3"/>
                           <a:stretch>
-                            <a:fillRect l="-613" t="-388148" r="-1093252" b="-2222"/>
+                            <a:fillRect l="-455" t="-382222" r="-784091" b="-2222"/>
                           </a:stretch>
                         </a:blipFill>
                       </a:tcPr>
@@ -6276,7 +6426,7 @@
                         <a:blipFill>
                           <a:blip r:embed="rId3"/>
                           <a:stretch>
-                            <a:fillRect l="-136375" t="-388148" r="-365" b="-2222"/>
+                            <a:fillRect l="-136375" t="-382222" r="-365" b="-2222"/>
                           </a:stretch>
                         </a:blipFill>
                       </a:tcPr>
@@ -17963,7 +18113,7 @@
           <a:p>
             <a:r>
               <a:rPr lang="en-US" dirty="0"/>
-              <a:t>Commonly used to describe behavior of synchronous models</a:t>
+              <a:t>Commonly used to describe behavior of models</a:t>
             </a:r>
           </a:p>
           <a:p>
@@ -18848,39 +18998,6 @@
       </p:grpSpPr>
       <p:sp>
         <p:nvSpPr>
-          <p:cNvPr id="2" name="Content Placeholder 1">
-            <a:extLst>
-              <a:ext uri="{FF2B5EF4-FFF2-40B4-BE49-F238E27FC236}">
-                <a16:creationId xmlns:a16="http://schemas.microsoft.com/office/drawing/2014/main" id="{D672F82B-29E9-4765-80EB-19385CAE4C63}"/>
-              </a:ext>
-            </a:extLst>
-          </p:cNvPr>
-          <p:cNvSpPr>
-            <a:spLocks noGrp="1"/>
-          </p:cNvSpPr>
-          <p:nvPr>
-            <p:ph idx="1"/>
-          </p:nvPr>
-        </p:nvSpPr>
-        <p:spPr>
-          <a:xfrm>
-            <a:off x="166681" y="1332703"/>
-            <a:ext cx="11699087" cy="1064715"/>
-          </a:xfrm>
-        </p:spPr>
-        <p:txBody>
-          <a:bodyPr/>
-          <a:lstStyle/>
-          <a:p>
-            <a:r>
-              <a:rPr lang="en-US" dirty="0"/>
-              <a:t>Commonly used to describe behavior of MBD models</a:t>
-            </a:r>
-          </a:p>
-        </p:txBody>
-      </p:sp>
-      <p:sp>
-        <p:nvSpPr>
           <p:cNvPr id="3" name="Title 2">
             <a:extLst>
               <a:ext uri="{FF2B5EF4-FFF2-40B4-BE49-F238E27FC236}">
@@ -18951,7 +19068,7 @@
         </p:nvSpPr>
         <p:spPr>
           <a:xfrm>
-            <a:off x="2099389" y="2836853"/>
+            <a:off x="685636" y="2214283"/>
             <a:ext cx="2311248" cy="1064715"/>
           </a:xfrm>
           <a:prstGeom prst="ellipse">
@@ -19002,7 +19119,7 @@
         </p:nvCxnSpPr>
         <p:spPr>
           <a:xfrm>
-            <a:off x="4410637" y="3369211"/>
+            <a:off x="2996884" y="2746641"/>
             <a:ext cx="1216252" cy="971792"/>
           </a:xfrm>
           <a:prstGeom prst="straightConnector1">
@@ -19030,8 +19147,8 @@
           </a:fontRef>
         </p:style>
       </p:cxnSp>
-      <mc:AlternateContent xmlns:mc="http://schemas.openxmlformats.org/markup-compatibility/2006" xmlns:a14="http://schemas.microsoft.com/office/drawing/2010/main">
-        <mc:Choice Requires="a14">
+      <mc:AlternateContent xmlns:mc="http://schemas.openxmlformats.org/markup-compatibility/2006">
+        <mc:Choice xmlns:a14="http://schemas.microsoft.com/office/drawing/2010/main" Requires="a14">
           <p:sp>
             <p:nvSpPr>
               <p:cNvPr id="44" name="TextBox 43">
@@ -19046,7 +19163,7 @@
             </p:nvSpPr>
             <p:spPr>
               <a:xfrm>
-                <a:off x="5193770" y="2977647"/>
+                <a:off x="3780017" y="2355077"/>
                 <a:ext cx="2381358" cy="830997"/>
               </a:xfrm>
               <a:prstGeom prst="rect">
@@ -19085,7 +19202,7 @@
             </p:txBody>
           </p:sp>
         </mc:Choice>
-        <mc:Fallback xmlns="">
+        <mc:Fallback>
           <p:sp>
             <p:nvSpPr>
               <p:cNvPr id="44" name="TextBox 43">
@@ -19102,7 +19219,7 @@
             </p:nvSpPr>
             <p:spPr>
               <a:xfrm>
-                <a:off x="5193770" y="2977647"/>
+                <a:off x="3780017" y="2355077"/>
                 <a:ext cx="2381358" cy="830997"/>
               </a:xfrm>
               <a:prstGeom prst="rect">
@@ -19111,7 +19228,7 @@
               <a:blipFill>
                 <a:blip r:embed="rId2"/>
                 <a:stretch>
-                  <a:fillRect l="-4092" t="-5839" r="-2302" b="-15328"/>
+                  <a:fillRect l="-3836" t="-5839" r="-2558" b="-15328"/>
                 </a:stretch>
               </a:blipFill>
             </p:spPr>
@@ -19146,7 +19263,7 @@
         </p:nvCxnSpPr>
         <p:spPr>
           <a:xfrm>
-            <a:off x="8806702" y="2298980"/>
+            <a:off x="7392949" y="1676410"/>
             <a:ext cx="512863" cy="443878"/>
           </a:xfrm>
           <a:prstGeom prst="straightConnector1">
@@ -19188,7 +19305,7 @@
         </p:nvSpPr>
         <p:spPr>
           <a:xfrm>
-            <a:off x="5489511" y="4128066"/>
+            <a:off x="4075758" y="3505496"/>
             <a:ext cx="2311248" cy="1064715"/>
           </a:xfrm>
           <a:prstGeom prst="ellipse">
@@ -19236,7 +19353,7 @@
         </p:nvSpPr>
         <p:spPr>
           <a:xfrm>
-            <a:off x="9137781" y="2520919"/>
+            <a:off x="7724028" y="1898349"/>
             <a:ext cx="2311248" cy="1064715"/>
           </a:xfrm>
           <a:prstGeom prst="ellipse">
@@ -29675,7 +29792,7 @@
         </p:nvSpPr>
         <p:spPr>
           <a:xfrm>
-            <a:off x="166680" y="1855217"/>
+            <a:off x="160195" y="1349379"/>
             <a:ext cx="11699087" cy="4300653"/>
           </a:xfrm>
         </p:spPr>
@@ -30081,14 +30198,14 @@
           <a:p>
             <a:pPr lvl="1"/>
             <a:r>
-              <a:rPr lang="en-US" dirty="0"/>
+              <a:rPr lang="en-US" sz="2400" dirty="0"/>
               <a:t>Processes in distributed computation, multiple threads in any modern OS</a:t>
             </a:r>
           </a:p>
           <a:p>
             <a:pPr lvl="1"/>
             <a:r>
-              <a:rPr lang="en-US" dirty="0"/>
+              <a:rPr lang="en-US" sz="2400" dirty="0"/>
               <a:t>Interrupt-driven processing</a:t>
             </a:r>
           </a:p>
@@ -30130,8 +30247,8 @@
           <a:chExt cx="0" cy="0"/>
         </a:xfrm>
       </p:grpSpPr>
-      <mc:AlternateContent xmlns:mc="http://schemas.openxmlformats.org/markup-compatibility/2006" xmlns:a14="http://schemas.microsoft.com/office/drawing/2010/main">
-        <mc:Choice Requires="a14">
+      <mc:AlternateContent xmlns:mc="http://schemas.openxmlformats.org/markup-compatibility/2006">
+        <mc:Choice xmlns:a14="http://schemas.microsoft.com/office/drawing/2010/main" Requires="a14">
           <p:sp>
             <p:nvSpPr>
               <p:cNvPr id="2" name="Content Placeholder 1">
@@ -30156,7 +30273,7 @@
             </p:spPr>
             <p:txBody>
               <a:bodyPr>
-                <a:normAutofit/>
+                <a:normAutofit lnSpcReduction="10000"/>
               </a:bodyPr>
               <a:lstStyle/>
               <a:p>
@@ -30312,7 +30429,7 @@
             </p:txBody>
           </p:sp>
         </mc:Choice>
-        <mc:Fallback xmlns="">
+        <mc:Fallback>
           <p:sp>
             <p:nvSpPr>
               <p:cNvPr id="2" name="Content Placeholder 1">
@@ -30337,7 +30454,7 @@
               <a:blipFill>
                 <a:blip r:embed="rId2"/>
                 <a:stretch>
-                  <a:fillRect l="-1328" t="-2384" r="-1941"/>
+                  <a:fillRect l="-1328" t="-3506" r="-1839"/>
                 </a:stretch>
               </a:blipFill>
             </p:spPr>
@@ -32308,7 +32425,9 @@
         </p:nvSpPr>
         <p:spPr/>
         <p:txBody>
-          <a:bodyPr/>
+          <a:bodyPr>
+            <a:normAutofit fontScale="90000"/>
+          </a:bodyPr>
           <a:lstStyle/>
           <a:p>
             <a:r>
@@ -38623,8 +38742,11 @@
           <a:p>
             <a:pPr algn="ctr"/>
             <a:r>
-              <a:rPr lang="en-US" sz="2400" dirty="0"/>
-              <a:t>Asynchronous Processes can also be represented with extended state machines</a:t>
+              <a:rPr lang="en-US" sz="2400" dirty="0">
+                <a:latin typeface="Cambria" panose="02040503050406030204" pitchFamily="18" charset="0"/>
+                <a:ea typeface="Cambria" panose="02040503050406030204" pitchFamily="18" charset="0"/>
+              </a:rPr>
+              <a:t>Asynchronous Processes can also be represented with ESMs</a:t>
             </a:r>
           </a:p>
         </p:txBody>
@@ -47038,6 +47160,570 @@
           <p:cNvPr id="2" name="Content Placeholder 1">
             <a:extLst>
               <a:ext uri="{FF2B5EF4-FFF2-40B4-BE49-F238E27FC236}">
+                <a16:creationId xmlns:a16="http://schemas.microsoft.com/office/drawing/2014/main" id="{2EF5A298-E539-4222-7247-2D14AE9C6BD4}"/>
+              </a:ext>
+            </a:extLst>
+          </p:cNvPr>
+          <p:cNvSpPr>
+            <a:spLocks noGrp="1"/>
+          </p:cNvSpPr>
+          <p:nvPr>
+            <p:ph idx="1"/>
+          </p:nvPr>
+        </p:nvSpPr>
+        <p:spPr>
+          <a:xfrm>
+            <a:off x="166681" y="1562911"/>
+            <a:ext cx="11699087" cy="4121130"/>
+          </a:xfrm>
+        </p:spPr>
+        <p:txBody>
+          <a:bodyPr/>
+          <a:lstStyle/>
+          <a:p>
+            <a:pPr marL="0" indent="0">
+              <a:buNone/>
+            </a:pPr>
+            <a:r>
+              <a:rPr lang="en-US" dirty="0"/>
+              <a:t>What are the advantages of modeling computation with components?</a:t>
+            </a:r>
+          </a:p>
+          <a:p>
+            <a:r>
+              <a:rPr lang="en-US" dirty="0"/>
+              <a:t>Allows expressing a design compositionally</a:t>
+            </a:r>
+          </a:p>
+          <a:p>
+            <a:r>
+              <a:rPr lang="en-US" dirty="0"/>
+              <a:t>Component-level behavioral properties/specifications</a:t>
+            </a:r>
+          </a:p>
+          <a:p>
+            <a:r>
+              <a:rPr lang="en-US" dirty="0"/>
+              <a:t>Global properties/specifications</a:t>
+            </a:r>
+          </a:p>
+          <a:p>
+            <a:r>
+              <a:rPr lang="en-US" dirty="0"/>
+              <a:t>Reasoning about properties such as deadlocks, </a:t>
+            </a:r>
+            <a:r>
+              <a:rPr lang="en-US" dirty="0" err="1"/>
+              <a:t>livelocks</a:t>
+            </a:r>
+            <a:r>
+              <a:rPr lang="en-US" dirty="0"/>
+              <a:t>, race conditions</a:t>
+            </a:r>
+          </a:p>
+          <a:p>
+            <a:r>
+              <a:rPr lang="en-US" dirty="0"/>
+              <a:t>Reasoning about timing, priorities, etc.</a:t>
+            </a:r>
+          </a:p>
+          <a:p>
+            <a:pPr marL="0" indent="0">
+              <a:buNone/>
+            </a:pPr>
+            <a:r>
+              <a:rPr lang="en-US" i="1" dirty="0"/>
+              <a:t>Later in the course, we will learn about how to write such properties and use tools to test/verify these properties</a:t>
+            </a:r>
+            <a:r>
+              <a:rPr lang="en-US" dirty="0"/>
+              <a:t>!</a:t>
+            </a:r>
+          </a:p>
+        </p:txBody>
+      </p:sp>
+      <p:sp>
+        <p:nvSpPr>
+          <p:cNvPr id="3" name="Title 2">
+            <a:extLst>
+              <a:ext uri="{FF2B5EF4-FFF2-40B4-BE49-F238E27FC236}">
+                <a16:creationId xmlns:a16="http://schemas.microsoft.com/office/drawing/2014/main" id="{7507446D-3888-B7F9-6A1C-9C9BF9866C34}"/>
+              </a:ext>
+            </a:extLst>
+          </p:cNvPr>
+          <p:cNvSpPr>
+            <a:spLocks noGrp="1"/>
+          </p:cNvSpPr>
+          <p:nvPr>
+            <p:ph type="title"/>
+          </p:nvPr>
+        </p:nvSpPr>
+        <p:spPr/>
+        <p:txBody>
+          <a:bodyPr>
+            <a:normAutofit/>
+          </a:bodyPr>
+          <a:lstStyle/>
+          <a:p>
+            <a:r>
+              <a:rPr lang="en-US" dirty="0"/>
+              <a:t>Synch and </a:t>
+            </a:r>
+            <a:r>
+              <a:rPr lang="en-US" dirty="0" err="1"/>
+              <a:t>Asynch</a:t>
+            </a:r>
+            <a:r>
+              <a:rPr lang="en-US" dirty="0"/>
+              <a:t> Components Behaviors</a:t>
+            </a:r>
+          </a:p>
+        </p:txBody>
+      </p:sp>
+      <p:sp>
+        <p:nvSpPr>
+          <p:cNvPr id="4" name="Slide Number Placeholder 3">
+            <a:extLst>
+              <a:ext uri="{FF2B5EF4-FFF2-40B4-BE49-F238E27FC236}">
+                <a16:creationId xmlns:a16="http://schemas.microsoft.com/office/drawing/2014/main" id="{7CB83631-2D80-DE4E-7D77-925D628D1029}"/>
+              </a:ext>
+            </a:extLst>
+          </p:cNvPr>
+          <p:cNvSpPr>
+            <a:spLocks noGrp="1"/>
+          </p:cNvSpPr>
+          <p:nvPr>
+            <p:ph type="sldNum" sz="quarter" idx="12"/>
+          </p:nvPr>
+        </p:nvSpPr>
+        <p:spPr/>
+        <p:txBody>
+          <a:bodyPr/>
+          <a:lstStyle/>
+          <a:p>
+            <a:fld id="{29AAD378-655A-49C6-813C-9FD132EF7440}" type="slidenum">
+              <a:rPr lang="en-US" smtClean="0"/>
+              <a:pPr/>
+              <a:t>47</a:t>
+            </a:fld>
+            <a:endParaRPr lang="en-US" dirty="0"/>
+          </a:p>
+        </p:txBody>
+      </p:sp>
+    </p:spTree>
+    <p:extLst>
+      <p:ext uri="{BB962C8B-B14F-4D97-AF65-F5344CB8AC3E}">
+        <p14:creationId xmlns:p14="http://schemas.microsoft.com/office/powerpoint/2010/main" val="3319535357"/>
+      </p:ext>
+    </p:extLst>
+  </p:cSld>
+  <p:clrMapOvr>
+    <a:masterClrMapping/>
+  </p:clrMapOvr>
+  <p:timing>
+    <p:tnLst>
+      <p:par>
+        <p:cTn id="1" dur="indefinite" restart="never" nodeType="tmRoot">
+          <p:childTnLst>
+            <p:seq concurrent="1" nextAc="seek">
+              <p:cTn id="2" dur="indefinite" nodeType="mainSeq">
+                <p:childTnLst>
+                  <p:par>
+                    <p:cTn id="3" fill="hold">
+                      <p:stCondLst>
+                        <p:cond delay="indefinite"/>
+                        <p:cond evt="onBegin" delay="0">
+                          <p:tn val="2"/>
+                        </p:cond>
+                      </p:stCondLst>
+                      <p:childTnLst>
+                        <p:par>
+                          <p:cTn id="4" fill="hold">
+                            <p:stCondLst>
+                              <p:cond delay="0"/>
+                            </p:stCondLst>
+                            <p:childTnLst>
+                              <p:par>
+                                <p:cTn id="5" presetID="1" presetClass="entr" presetSubtype="0" fill="hold" grpId="0" nodeType="withEffect">
+                                  <p:stCondLst>
+                                    <p:cond delay="0"/>
+                                  </p:stCondLst>
+                                  <p:childTnLst>
+                                    <p:set>
+                                      <p:cBhvr>
+                                        <p:cTn id="6" dur="1" fill="hold">
+                                          <p:stCondLst>
+                                            <p:cond delay="0"/>
+                                          </p:stCondLst>
+                                        </p:cTn>
+                                        <p:tgtEl>
+                                          <p:spTgt spid="2">
+                                            <p:txEl>
+                                              <p:pRg st="0" end="0"/>
+                                            </p:txEl>
+                                          </p:spTgt>
+                                        </p:tgtEl>
+                                        <p:attrNameLst>
+                                          <p:attrName>style.visibility</p:attrName>
+                                        </p:attrNameLst>
+                                      </p:cBhvr>
+                                      <p:to>
+                                        <p:strVal val="visible"/>
+                                      </p:to>
+                                    </p:set>
+                                  </p:childTnLst>
+                                </p:cTn>
+                              </p:par>
+                            </p:childTnLst>
+                          </p:cTn>
+                        </p:par>
+                      </p:childTnLst>
+                    </p:cTn>
+                  </p:par>
+                  <p:par>
+                    <p:cTn id="7" fill="hold">
+                      <p:stCondLst>
+                        <p:cond delay="indefinite"/>
+                      </p:stCondLst>
+                      <p:childTnLst>
+                        <p:par>
+                          <p:cTn id="8" fill="hold">
+                            <p:stCondLst>
+                              <p:cond delay="0"/>
+                            </p:stCondLst>
+                            <p:childTnLst>
+                              <p:par>
+                                <p:cTn id="9" presetID="1" presetClass="entr" presetSubtype="0" fill="hold" grpId="0" nodeType="clickEffect">
+                                  <p:stCondLst>
+                                    <p:cond delay="0"/>
+                                  </p:stCondLst>
+                                  <p:childTnLst>
+                                    <p:set>
+                                      <p:cBhvr>
+                                        <p:cTn id="10" dur="1" fill="hold">
+                                          <p:stCondLst>
+                                            <p:cond delay="0"/>
+                                          </p:stCondLst>
+                                        </p:cTn>
+                                        <p:tgtEl>
+                                          <p:spTgt spid="2">
+                                            <p:txEl>
+                                              <p:pRg st="1" end="1"/>
+                                            </p:txEl>
+                                          </p:spTgt>
+                                        </p:tgtEl>
+                                        <p:attrNameLst>
+                                          <p:attrName>style.visibility</p:attrName>
+                                        </p:attrNameLst>
+                                      </p:cBhvr>
+                                      <p:to>
+                                        <p:strVal val="visible"/>
+                                      </p:to>
+                                    </p:set>
+                                  </p:childTnLst>
+                                </p:cTn>
+                              </p:par>
+                            </p:childTnLst>
+                          </p:cTn>
+                        </p:par>
+                      </p:childTnLst>
+                    </p:cTn>
+                  </p:par>
+                  <p:par>
+                    <p:cTn id="11" fill="hold">
+                      <p:stCondLst>
+                        <p:cond delay="indefinite"/>
+                      </p:stCondLst>
+                      <p:childTnLst>
+                        <p:par>
+                          <p:cTn id="12" fill="hold">
+                            <p:stCondLst>
+                              <p:cond delay="0"/>
+                            </p:stCondLst>
+                            <p:childTnLst>
+                              <p:par>
+                                <p:cTn id="13" presetID="1" presetClass="entr" presetSubtype="0" fill="hold" grpId="0" nodeType="clickEffect">
+                                  <p:stCondLst>
+                                    <p:cond delay="0"/>
+                                  </p:stCondLst>
+                                  <p:childTnLst>
+                                    <p:set>
+                                      <p:cBhvr>
+                                        <p:cTn id="14" dur="1" fill="hold">
+                                          <p:stCondLst>
+                                            <p:cond delay="0"/>
+                                          </p:stCondLst>
+                                        </p:cTn>
+                                        <p:tgtEl>
+                                          <p:spTgt spid="2">
+                                            <p:txEl>
+                                              <p:pRg st="2" end="2"/>
+                                            </p:txEl>
+                                          </p:spTgt>
+                                        </p:tgtEl>
+                                        <p:attrNameLst>
+                                          <p:attrName>style.visibility</p:attrName>
+                                        </p:attrNameLst>
+                                      </p:cBhvr>
+                                      <p:to>
+                                        <p:strVal val="visible"/>
+                                      </p:to>
+                                    </p:set>
+                                  </p:childTnLst>
+                                </p:cTn>
+                              </p:par>
+                            </p:childTnLst>
+                          </p:cTn>
+                        </p:par>
+                      </p:childTnLst>
+                    </p:cTn>
+                  </p:par>
+                  <p:par>
+                    <p:cTn id="15" fill="hold">
+                      <p:stCondLst>
+                        <p:cond delay="indefinite"/>
+                      </p:stCondLst>
+                      <p:childTnLst>
+                        <p:par>
+                          <p:cTn id="16" fill="hold">
+                            <p:stCondLst>
+                              <p:cond delay="0"/>
+                            </p:stCondLst>
+                            <p:childTnLst>
+                              <p:par>
+                                <p:cTn id="17" presetID="1" presetClass="entr" presetSubtype="0" fill="hold" grpId="0" nodeType="clickEffect">
+                                  <p:stCondLst>
+                                    <p:cond delay="0"/>
+                                  </p:stCondLst>
+                                  <p:childTnLst>
+                                    <p:set>
+                                      <p:cBhvr>
+                                        <p:cTn id="18" dur="1" fill="hold">
+                                          <p:stCondLst>
+                                            <p:cond delay="0"/>
+                                          </p:stCondLst>
+                                        </p:cTn>
+                                        <p:tgtEl>
+                                          <p:spTgt spid="2">
+                                            <p:txEl>
+                                              <p:pRg st="3" end="3"/>
+                                            </p:txEl>
+                                          </p:spTgt>
+                                        </p:tgtEl>
+                                        <p:attrNameLst>
+                                          <p:attrName>style.visibility</p:attrName>
+                                        </p:attrNameLst>
+                                      </p:cBhvr>
+                                      <p:to>
+                                        <p:strVal val="visible"/>
+                                      </p:to>
+                                    </p:set>
+                                  </p:childTnLst>
+                                </p:cTn>
+                              </p:par>
+                            </p:childTnLst>
+                          </p:cTn>
+                        </p:par>
+                      </p:childTnLst>
+                    </p:cTn>
+                  </p:par>
+                  <p:par>
+                    <p:cTn id="19" fill="hold">
+                      <p:stCondLst>
+                        <p:cond delay="indefinite"/>
+                      </p:stCondLst>
+                      <p:childTnLst>
+                        <p:par>
+                          <p:cTn id="20" fill="hold">
+                            <p:stCondLst>
+                              <p:cond delay="0"/>
+                            </p:stCondLst>
+                            <p:childTnLst>
+                              <p:par>
+                                <p:cTn id="21" presetID="1" presetClass="entr" presetSubtype="0" fill="hold" grpId="0" nodeType="clickEffect">
+                                  <p:stCondLst>
+                                    <p:cond delay="0"/>
+                                  </p:stCondLst>
+                                  <p:childTnLst>
+                                    <p:set>
+                                      <p:cBhvr>
+                                        <p:cTn id="22" dur="1" fill="hold">
+                                          <p:stCondLst>
+                                            <p:cond delay="0"/>
+                                          </p:stCondLst>
+                                        </p:cTn>
+                                        <p:tgtEl>
+                                          <p:spTgt spid="2">
+                                            <p:txEl>
+                                              <p:pRg st="4" end="4"/>
+                                            </p:txEl>
+                                          </p:spTgt>
+                                        </p:tgtEl>
+                                        <p:attrNameLst>
+                                          <p:attrName>style.visibility</p:attrName>
+                                        </p:attrNameLst>
+                                      </p:cBhvr>
+                                      <p:to>
+                                        <p:strVal val="visible"/>
+                                      </p:to>
+                                    </p:set>
+                                  </p:childTnLst>
+                                </p:cTn>
+                              </p:par>
+                            </p:childTnLst>
+                          </p:cTn>
+                        </p:par>
+                      </p:childTnLst>
+                    </p:cTn>
+                  </p:par>
+                  <p:par>
+                    <p:cTn id="23" fill="hold">
+                      <p:stCondLst>
+                        <p:cond delay="indefinite"/>
+                      </p:stCondLst>
+                      <p:childTnLst>
+                        <p:par>
+                          <p:cTn id="24" fill="hold">
+                            <p:stCondLst>
+                              <p:cond delay="0"/>
+                            </p:stCondLst>
+                            <p:childTnLst>
+                              <p:par>
+                                <p:cTn id="25" presetID="1" presetClass="entr" presetSubtype="0" fill="hold" grpId="0" nodeType="clickEffect">
+                                  <p:stCondLst>
+                                    <p:cond delay="0"/>
+                                  </p:stCondLst>
+                                  <p:childTnLst>
+                                    <p:set>
+                                      <p:cBhvr>
+                                        <p:cTn id="26" dur="1" fill="hold">
+                                          <p:stCondLst>
+                                            <p:cond delay="0"/>
+                                          </p:stCondLst>
+                                        </p:cTn>
+                                        <p:tgtEl>
+                                          <p:spTgt spid="2">
+                                            <p:txEl>
+                                              <p:pRg st="5" end="5"/>
+                                            </p:txEl>
+                                          </p:spTgt>
+                                        </p:tgtEl>
+                                        <p:attrNameLst>
+                                          <p:attrName>style.visibility</p:attrName>
+                                        </p:attrNameLst>
+                                      </p:cBhvr>
+                                      <p:to>
+                                        <p:strVal val="visible"/>
+                                      </p:to>
+                                    </p:set>
+                                  </p:childTnLst>
+                                </p:cTn>
+                              </p:par>
+                            </p:childTnLst>
+                          </p:cTn>
+                        </p:par>
+                      </p:childTnLst>
+                    </p:cTn>
+                  </p:par>
+                  <p:par>
+                    <p:cTn id="27" fill="hold">
+                      <p:stCondLst>
+                        <p:cond delay="indefinite"/>
+                      </p:stCondLst>
+                      <p:childTnLst>
+                        <p:par>
+                          <p:cTn id="28" fill="hold">
+                            <p:stCondLst>
+                              <p:cond delay="0"/>
+                            </p:stCondLst>
+                            <p:childTnLst>
+                              <p:par>
+                                <p:cTn id="29" presetID="1" presetClass="entr" presetSubtype="0" fill="hold" grpId="0" nodeType="clickEffect">
+                                  <p:stCondLst>
+                                    <p:cond delay="0"/>
+                                  </p:stCondLst>
+                                  <p:childTnLst>
+                                    <p:set>
+                                      <p:cBhvr>
+                                        <p:cTn id="30" dur="1" fill="hold">
+                                          <p:stCondLst>
+                                            <p:cond delay="0"/>
+                                          </p:stCondLst>
+                                        </p:cTn>
+                                        <p:tgtEl>
+                                          <p:spTgt spid="2">
+                                            <p:txEl>
+                                              <p:pRg st="6" end="6"/>
+                                            </p:txEl>
+                                          </p:spTgt>
+                                        </p:tgtEl>
+                                        <p:attrNameLst>
+                                          <p:attrName>style.visibility</p:attrName>
+                                        </p:attrNameLst>
+                                      </p:cBhvr>
+                                      <p:to>
+                                        <p:strVal val="visible"/>
+                                      </p:to>
+                                    </p:set>
+                                  </p:childTnLst>
+                                </p:cTn>
+                              </p:par>
+                            </p:childTnLst>
+                          </p:cTn>
+                        </p:par>
+                      </p:childTnLst>
+                    </p:cTn>
+                  </p:par>
+                </p:childTnLst>
+              </p:cTn>
+              <p:prevCondLst>
+                <p:cond evt="onPrev" delay="0">
+                  <p:tgtEl>
+                    <p:sldTgt/>
+                  </p:tgtEl>
+                </p:cond>
+              </p:prevCondLst>
+              <p:nextCondLst>
+                <p:cond evt="onNext" delay="0">
+                  <p:tgtEl>
+                    <p:sldTgt/>
+                  </p:tgtEl>
+                </p:cond>
+              </p:nextCondLst>
+            </p:seq>
+          </p:childTnLst>
+        </p:cTn>
+      </p:par>
+    </p:tnLst>
+    <p:bldLst>
+      <p:bldP spid="2" grpId="0" uiExpand="1" build="p"/>
+    </p:bldLst>
+  </p:timing>
+</p:sld>
+</file>
+
+<file path=ppt/slides/slide48.xml><?xml version="1.0" encoding="utf-8"?>
+<p:sld xmlns:a="http://schemas.openxmlformats.org/drawingml/2006/main" xmlns:r="http://schemas.openxmlformats.org/officeDocument/2006/relationships" xmlns:p="http://schemas.openxmlformats.org/presentationml/2006/main">
+  <p:cSld>
+    <p:spTree>
+      <p:nvGrpSpPr>
+        <p:cNvPr id="1" name=""/>
+        <p:cNvGrpSpPr/>
+        <p:nvPr/>
+      </p:nvGrpSpPr>
+      <p:grpSpPr>
+        <a:xfrm>
+          <a:off x="0" y="0"/>
+          <a:ext cx="0" cy="0"/>
+          <a:chOff x="0" y="0"/>
+          <a:chExt cx="0" cy="0"/>
+        </a:xfrm>
+      </p:grpSpPr>
+      <p:sp>
+        <p:nvSpPr>
+          <p:cNvPr id="2" name="Content Placeholder 1">
+            <a:extLst>
+              <a:ext uri="{FF2B5EF4-FFF2-40B4-BE49-F238E27FC236}">
                 <a16:creationId xmlns:a16="http://schemas.microsoft.com/office/drawing/2014/main" id="{2BAF33BC-7780-4D25-B588-22FCD6D09D59}"/>
               </a:ext>
             </a:extLst>
@@ -47140,7 +47826,7 @@
             <a:fld id="{29AAD378-655A-49C6-813C-9FD132EF7440}" type="slidenum">
               <a:rPr lang="en-US" smtClean="0"/>
               <a:pPr/>
-              <a:t>47</a:t>
+              <a:t>48</a:t>
             </a:fld>
             <a:endParaRPr lang="en-US" dirty="0"/>
           </a:p>
@@ -47252,8 +47938,8 @@
         </p:nvSpPr>
         <p:spPr>
           <a:xfrm>
-            <a:off x="166681" y="1335505"/>
-            <a:ext cx="11699087" cy="4348536"/>
+            <a:off x="114214" y="1487403"/>
+            <a:ext cx="11699087" cy="2098862"/>
           </a:xfrm>
         </p:spPr>
         <p:txBody>
@@ -47264,33 +47950,7 @@
           <a:p>
             <a:r>
               <a:rPr lang="en-US" dirty="0"/>
-              <a:t>Synchronous Model of Computation</a:t>
-            </a:r>
-          </a:p>
-          <a:p>
-            <a:r>
-              <a:rPr lang="en-US" dirty="0"/>
-              <a:t>Asynchronous Model of Computation</a:t>
-            </a:r>
-          </a:p>
-          <a:p>
-            <a:r>
-              <a:rPr lang="en-US" dirty="0"/>
-              <a:t>Timed Models</a:t>
-            </a:r>
-          </a:p>
-          <a:p>
-            <a:pPr lvl="1"/>
-            <a:r>
-              <a:rPr lang="en-US" dirty="0"/>
-              <a:t>Like Asynchronous models, but with explicit time information</a:t>
-            </a:r>
-          </a:p>
-          <a:p>
-            <a:pPr lvl="1"/>
-            <a:r>
-              <a:rPr lang="en-US" dirty="0"/>
-              <a:t>Can make use of global time for coordination</a:t>
+              <a:t>Synchronous &amp; Asynchronous Model of Computation</a:t>
             </a:r>
           </a:p>
           <a:p>

--- a/teaching/cs513-autocps-fall-2026/slides/2-ModelsOfComputation.pptx
+++ b/teaching/cs513-autocps-fall-2026/slides/2-ModelsOfComputation.pptx
@@ -262,7 +262,7 @@
           <a:p>
             <a:fld id="{459B985A-4C37-4D1F-A437-E4A951A85D11}" type="datetimeFigureOut">
               <a:rPr lang="en-US" smtClean="0"/>
-              <a:t>8/24/2026</a:t>
+              <a:t>9/1/2026</a:t>
             </a:fld>
             <a:endParaRPr lang="en-US"/>
           </a:p>
@@ -663,7 +663,7 @@
           <a:p>
             <a:fld id="{6580C23F-98B7-41D4-A9FA-15A275A51486}" type="datetimeFigureOut">
               <a:rPr lang="en-US" smtClean="0"/>
-              <a:t>8/24/2026</a:t>
+              <a:t>9/1/2026</a:t>
             </a:fld>
             <a:endParaRPr lang="en-US"/>
           </a:p>
@@ -1532,7 +1532,7 @@
           <p:nvPr userDrawn="1"/>
         </p:nvPicPr>
         <mc:AlternateContent xmlns:mc="http://schemas.openxmlformats.org/markup-compatibility/2006">
-          <mc:Choice xmlns="" xmlns:mv="urn:schemas-microsoft-com:mac:vml" xmlns:ma="http://schemas.microsoft.com/office/mac/drawingml/2008/main" Requires="ma">
+          <mc:Choice xmlns:ma="http://schemas.microsoft.com/office/mac/drawingml/2008/main" xmlns:mv="urn:schemas-microsoft-com:mac:vml" xmlns="" Requires="ma">
             <p:blipFill>
               <a:blip r:embed="rId3"/>
               <a:stretch>
@@ -4757,8 +4757,8 @@
           <a:chExt cx="0" cy="0"/>
         </a:xfrm>
       </p:grpSpPr>
-      <mc:AlternateContent xmlns:mc="http://schemas.openxmlformats.org/markup-compatibility/2006">
-        <mc:Choice xmlns:a14="http://schemas.microsoft.com/office/drawing/2010/main" Requires="a14">
+      <mc:AlternateContent xmlns:mc="http://schemas.openxmlformats.org/markup-compatibility/2006" xmlns:a14="http://schemas.microsoft.com/office/drawing/2010/main">
+        <mc:Choice Requires="a14">
           <p:sp>
             <p:nvSpPr>
               <p:cNvPr id="2" name="Content Placeholder 1">
@@ -4855,7 +4855,7 @@
             </p:txBody>
           </p:sp>
         </mc:Choice>
-        <mc:Fallback>
+        <mc:Fallback xmlns="">
           <p:sp>
             <p:nvSpPr>
               <p:cNvPr id="2" name="Content Placeholder 1">
@@ -4957,8 +4957,8 @@
           </a:p>
         </p:txBody>
       </p:sp>
-      <mc:AlternateContent xmlns:mc="http://schemas.openxmlformats.org/markup-compatibility/2006">
-        <mc:Choice xmlns:a14="http://schemas.microsoft.com/office/drawing/2010/main" Requires="a14">
+      <mc:AlternateContent xmlns:mc="http://schemas.openxmlformats.org/markup-compatibility/2006" xmlns:a14="http://schemas.microsoft.com/office/drawing/2010/main">
+        <mc:Choice Requires="a14">
           <p:graphicFrame>
             <p:nvGraphicFramePr>
               <p:cNvPr id="5" name="Table 4">
@@ -6094,7 +6094,7 @@
             </a:graphic>
           </p:graphicFrame>
         </mc:Choice>
-        <mc:Fallback>
+        <mc:Fallback xmlns="">
           <p:graphicFrame>
             <p:nvGraphicFramePr>
               <p:cNvPr id="5" name="Table 4">
@@ -19147,8 +19147,8 @@
           </a:fontRef>
         </p:style>
       </p:cxnSp>
-      <mc:AlternateContent xmlns:mc="http://schemas.openxmlformats.org/markup-compatibility/2006">
-        <mc:Choice xmlns:a14="http://schemas.microsoft.com/office/drawing/2010/main" Requires="a14">
+      <mc:AlternateContent xmlns:mc="http://schemas.openxmlformats.org/markup-compatibility/2006" xmlns:a14="http://schemas.microsoft.com/office/drawing/2010/main">
+        <mc:Choice Requires="a14">
           <p:sp>
             <p:nvSpPr>
               <p:cNvPr id="44" name="TextBox 43">
@@ -19202,7 +19202,7 @@
             </p:txBody>
           </p:sp>
         </mc:Choice>
-        <mc:Fallback>
+        <mc:Fallback xmlns="">
           <p:sp>
             <p:nvSpPr>
               <p:cNvPr id="44" name="TextBox 43">
@@ -30247,8 +30247,8 @@
           <a:chExt cx="0" cy="0"/>
         </a:xfrm>
       </p:grpSpPr>
-      <mc:AlternateContent xmlns:mc="http://schemas.openxmlformats.org/markup-compatibility/2006">
-        <mc:Choice xmlns:a14="http://schemas.microsoft.com/office/drawing/2010/main" Requires="a14">
+      <mc:AlternateContent xmlns:mc="http://schemas.openxmlformats.org/markup-compatibility/2006" xmlns:a14="http://schemas.microsoft.com/office/drawing/2010/main">
+        <mc:Choice Requires="a14">
           <p:sp>
             <p:nvSpPr>
               <p:cNvPr id="2" name="Content Placeholder 1">
@@ -30429,7 +30429,7 @@
             </p:txBody>
           </p:sp>
         </mc:Choice>
-        <mc:Fallback>
+        <mc:Fallback xmlns="">
           <p:sp>
             <p:nvSpPr>
               <p:cNvPr id="2" name="Content Placeholder 1">
